--- a/Hallucination_Detection_May18.pptx
+++ b/Hallucination_Detection_May18.pptx
@@ -3526,7 +3526,7 @@
                   <a:srgbClr val="CCD8F0"/>
                 </a:solidFill>
               </a:rPr>
-              <a:t>Falcon-3-10B  |  300 samples each  |  CoT prompting extends traces to 200-500 tokens -- still fails</a:t>
+              <a:t>Falcon-3-10B  |  300 samples each  |  CoT extends traces to 200-500 tokens -- still fails  |  TriviaQA plot only</a:t>
             </a:r>
           </a:p>
         </p:txBody>
@@ -3672,7 +3672,7 @@
                             <a:srgbClr val="FFFFFF"/>
                           </a:solidFill>
                         </a:rPr>
-                        <a:t>WebQ</a:t>
+                        <a:t>WebQ CoT</a:t>
                       </a:r>
                     </a:p>
                   </a:txBody>
@@ -4023,14 +4023,66 @@
       </p:graphicFrame>
       <p:sp>
         <p:nvSpPr>
-          <p:cNvPr id="8" name="TextBox 7"/>
+          <p:cNvPr id="8" name="Rectangle 7"/>
+          <p:cNvSpPr/>
+          <p:nvPr/>
+        </p:nvSpPr>
+        <p:spPr>
+          <a:xfrm>
+            <a:off x="6492240" y="3630168"/>
+            <a:ext cx="5486400" cy="777240"/>
+          </a:xfrm>
+          <a:prstGeom prst="rect">
+            <a:avLst/>
+          </a:prstGeom>
+          <a:solidFill>
+            <a:srgbClr val="FFF0CC"/>
+          </a:solidFill>
+          <a:ln>
+            <a:noFill/>
+          </a:ln>
+        </p:spPr>
+        <p:style>
+          <a:lnRef idx="1">
+            <a:schemeClr val="accent1"/>
+          </a:lnRef>
+          <a:fillRef idx="3">
+            <a:schemeClr val="accent1"/>
+          </a:fillRef>
+          <a:effectRef idx="2">
+            <a:schemeClr val="accent1"/>
+          </a:effectRef>
+          <a:fontRef idx="minor">
+            <a:schemeClr val="lt1"/>
+          </a:fontRef>
+        </p:style>
+        <p:txBody>
+          <a:bodyPr rtlCol="0" anchor="ctr" wrap="square"/>
+          <a:lstStyle/>
+          <a:p>
+            <a:pPr algn="ctr"/>
+            <a:r>
+              <a:rPr sz="1050" b="0">
+                <a:solidFill>
+                  <a:srgbClr val="804000"/>
+                </a:solidFill>
+              </a:rPr>
+              <a:t>WebQ direct answer: 0 correct samples in run =&gt; AUC undefined for direct-answer mode.
+Plot above shows TriviaQA only. WebQ CoT = 61.9% (CoT added enough tokens to compute spectral features).</a:t>
+            </a:r>
+          </a:p>
+        </p:txBody>
+      </p:sp>
+      <p:sp>
+        <p:nvSpPr>
+          <p:cNvPr id="9" name="TextBox 8"/>
           <p:cNvSpPr txBox="1"/>
           <p:nvPr/>
         </p:nvSpPr>
         <p:spPr>
           <a:xfrm>
-            <a:off x="6492240" y="3657600"/>
-            <a:ext cx="5486400" cy="1737360"/>
+            <a:off x="6492240" y="4526280"/>
+            <a:ext cx="5486400" cy="1554480"/>
           </a:xfrm>
           <a:prstGeom prst="rect">
             <a:avLst/>
@@ -4106,7 +4158,7 @@
       </p:sp>
       <p:sp>
         <p:nvSpPr>
-          <p:cNvPr id="9" name="Rectangle 8"/>
+          <p:cNvPr id="10" name="Rectangle 9"/>
           <p:cNvSpPr/>
           <p:nvPr/>
         </p:nvSpPr>
@@ -4506,7 +4558,7 @@
         </p:nvGraphicFramePr>
         <p:xfrm>
           <a:off x="7269480" y="1645920"/>
-          <a:ext cx="4892040" cy="2651760"/>
+          <a:ext cx="4846320" cy="2651760"/>
         </p:xfrm>
         <a:graphic>
           <a:graphicData uri="http://schemas.openxmlformats.org/drawingml/2006/table">
@@ -4516,10 +4568,10 @@
               </a:tblPr>
               <a:tblGrid>
                 <a:gridCol w="1371600"/>
-                <a:gridCol w="914400"/>
-                <a:gridCol w="685800"/>
-                <a:gridCol w="685800"/>
+                <a:gridCol w="1005840"/>
                 <a:gridCol w="640080"/>
+                <a:gridCol w="640080"/>
+                <a:gridCol w="594360"/>
                 <a:gridCol w="594360"/>
               </a:tblGrid>
               <a:tr h="662940">
@@ -4939,8 +4991,8 @@
                             <a:srgbClr val="323232"/>
                           </a:solidFill>
                         </a:rPr>
-                        <a:t>LOS-Net
-(2503.14043)</a:t>
+                        <a:t>LOS-Net (2503.14043)
+DIFFERENT TASK</a:t>
                       </a:r>
                     </a:p>
                   </a:txBody>
@@ -4962,8 +5014,8 @@
                             <a:srgbClr val="323232"/>
                           </a:solidFill>
                         </a:rPr>
-                        <a:t>HotpotQA
-Mistral-7B</a:t>
+                        <a:t>Std HotpotQA
+(no citations)</a:t>
                       </a:r>
                     </a:p>
                   </a:txBody>
@@ -5099,7 +5151,7 @@
                   <a:srgbClr val="009640"/>
                 </a:solidFill>
               </a:rPr>
-              <a:t>*  Beat supervised LOS-Net by +14.8 pp WITHOUT labels!</a:t>
+              <a:t>*  Novel task: unsupervised citation grounding on L-CiteEval -- no direct published competitor</a:t>
             </a:r>
           </a:p>
           <a:p>
@@ -5111,10 +5163,10 @@
             <a:r>
               <a:rPr sz="1100">
                 <a:solidFill>
-                  <a:srgbClr val="323232"/>
-                </a:solidFill>
-              </a:rPr>
-              <a:t>-&gt;  Median 16 cells: ~72.8% | 12/16 &gt;= 70%</a:t>
+                  <a:srgbClr val="FF6600"/>
+                </a:solidFill>
+              </a:rPr>
+              <a:t>-&gt;  LOS-Net uses standard HotpotQA (raw QA, no citation markers) -- different task</a:t>
             </a:r>
           </a:p>
           <a:p>
@@ -5126,10 +5178,10 @@
             <a:r>
               <a:rPr sz="1100">
                 <a:solidFill>
-                  <a:srgbClr val="323232"/>
-                </a:solidFill>
-              </a:rPr>
-              <a:t>-&gt;  Top features: rpdi + spectral_entropy + sw_var_peak_adaptive</a:t>
+                  <a:srgbClr val="009640"/>
+                </a:solidFill>
+              </a:rPr>
+              <a:t>-&gt;  Closest available benchmark: LOS-Net = 72.92%; we beat it by +14.8 pp (unsupervised!)</a:t>
             </a:r>
           </a:p>
           <a:p>
@@ -5144,7 +5196,7 @@
                   <a:srgbClr val="323232"/>
                 </a:solidFill>
               </a:rPr>
-              <a:t>-&gt;  Sanity check: trace_length alone = 50.8% (chance)</a:t>
+              <a:t>-&gt;  Median 16 cells: ~72.8% | 12/16 &gt;= 70%</a:t>
             </a:r>
           </a:p>
         </p:txBody>
@@ -5579,51 +5631,97 @@
                   <a:srgbClr val="CCD8F0"/>
                 </a:solidFill>
               </a:rPr>
-              <a:t>Phase 11a  |  MAX_STEPS=3  |  H(n) from Thought tokens only  |  Phi_min = weakest-link aggregation</a:t>
-            </a:r>
-          </a:p>
-        </p:txBody>
-      </p:sp>
-      <p:pic>
-        <p:nvPicPr>
-          <p:cNvPr id="5" name="Picture 4" descr="agentic_example.png"/>
-          <p:cNvPicPr>
-            <a:picLocks noChangeAspect="1"/>
-          </p:cNvPicPr>
-          <p:nvPr/>
-        </p:nvPicPr>
-        <p:blipFill>
-          <a:blip r:embed="rId2"/>
-          <a:stretch>
-            <a:fillRect/>
-          </a:stretch>
-        </p:blipFill>
-        <p:spPr>
-          <a:xfrm>
-            <a:off x="274320" y="1097280"/>
-            <a:ext cx="11704320" cy="5349240"/>
-          </a:xfrm>
-          <a:prstGeom prst="rect">
-            <a:avLst/>
-          </a:prstGeom>
-        </p:spPr>
-      </p:pic>
-      <p:sp>
-        <p:nvSpPr>
-          <p:cNvPr id="6" name="Rectangle 5"/>
+              <a:t>Phase 11a  |  Task: multi-hop QA via ReAct  |  H(n) from Thought tokens only  |  Phi_min = weakest-link aggregation</a:t>
+            </a:r>
+          </a:p>
+        </p:txBody>
+      </p:sp>
+      <p:sp>
+        <p:nvSpPr>
+          <p:cNvPr id="5" name="TextBox 4"/>
+          <p:cNvSpPr txBox="1"/>
+          <p:nvPr/>
+        </p:nvSpPr>
+        <p:spPr>
+          <a:xfrm>
+            <a:off x="274320" y="1143000"/>
+            <a:ext cx="5486400" cy="320040"/>
+          </a:xfrm>
+          <a:prstGeom prst="rect">
+            <a:avLst/>
+          </a:prstGeom>
+          <a:noFill/>
+        </p:spPr>
+        <p:txBody>
+          <a:bodyPr wrap="square">
+            <a:spAutoFit/>
+          </a:bodyPr>
+          <a:lstStyle/>
+          <a:p>
+            <a:pPr algn="l"/>
+            <a:r>
+              <a:rPr sz="1100" b="1">
+                <a:solidFill>
+                  <a:srgbClr val="1F497D"/>
+                </a:solidFill>
+              </a:rPr>
+              <a:t>Task (Phase 11a):</a:t>
+            </a:r>
+          </a:p>
+        </p:txBody>
+      </p:sp>
+      <p:sp>
+        <p:nvSpPr>
+          <p:cNvPr id="6" name="TextBox 5"/>
+          <p:cNvSpPr txBox="1"/>
+          <p:nvPr/>
+        </p:nvSpPr>
+        <p:spPr>
+          <a:xfrm>
+            <a:off x="274320" y="1481328"/>
+            <a:ext cx="5669280" cy="685800"/>
+          </a:xfrm>
+          <a:prstGeom prst="rect">
+            <a:avLst/>
+          </a:prstGeom>
+          <a:noFill/>
+        </p:spPr>
+        <p:txBody>
+          <a:bodyPr wrap="square">
+            <a:spAutoFit/>
+          </a:bodyPr>
+          <a:lstStyle/>
+          <a:p>
+            <a:pPr algn="l"/>
+            <a:r>
+              <a:rPr sz="1000" b="0">
+                <a:solidFill>
+                  <a:srgbClr val="323232"/>
+                </a:solidFill>
+              </a:rPr>
+              <a:t>Input: question + Wikipedia passage dictionary
+Model: ReAct loop, up to 3 steps (Thought =&gt; Action: search/finish =&gt; Observation)
+Label: trajectory_correct = final answer matches gold answer string</a:t>
+            </a:r>
+          </a:p>
+        </p:txBody>
+      </p:sp>
+      <p:sp>
+        <p:nvSpPr>
+          <p:cNvPr id="7" name="Rectangle 6"/>
           <p:cNvSpPr/>
           <p:nvPr/>
         </p:nvSpPr>
         <p:spPr>
           <a:xfrm>
-            <a:off x="274320" y="6492240"/>
-            <a:ext cx="11704320" cy="301752"/>
+            <a:off x="274320" y="2258568"/>
+            <a:ext cx="5669280" cy="777240"/>
           </a:xfrm>
           <a:prstGeom prst="rect">
             <a:avLst/>
           </a:prstGeom>
           <a:solidFill>
-            <a:srgbClr val="1F497D"/>
+            <a:srgbClr val="E8F0FE"/>
           </a:solidFill>
           <a:ln>
             <a:noFill/>
@@ -5649,12 +5747,89 @@
           <a:p>
             <a:pPr algn="ctr"/>
             <a:r>
-              <a:rPr sz="1150" b="0">
+              <a:rPr sz="1000" b="0">
+                <a:solidFill>
+                  <a:srgbClr val="323232"/>
+                </a:solidFill>
+              </a:rPr>
+              <a:t>vs RAG (Phase 10):  RAG = 1 forward pass, model generates full cited response, H(n) sliced by citation markers.
+Agentic = 3 separate passes; H(n) extracted from each Thought step (50-150 tokens); then aggregated via Phi.</a:t>
+            </a:r>
+          </a:p>
+        </p:txBody>
+      </p:sp>
+      <p:pic>
+        <p:nvPicPr>
+          <p:cNvPr id="8" name="Picture 7" descr="agentic_example.png"/>
+          <p:cNvPicPr>
+            <a:picLocks noChangeAspect="1"/>
+          </p:cNvPicPr>
+          <p:nvPr/>
+        </p:nvPicPr>
+        <p:blipFill>
+          <a:blip r:embed="rId2"/>
+          <a:stretch>
+            <a:fillRect/>
+          </a:stretch>
+        </p:blipFill>
+        <p:spPr>
+          <a:xfrm>
+            <a:off x="274320" y="3127248"/>
+            <a:ext cx="11704320" cy="3401568"/>
+          </a:xfrm>
+          <a:prstGeom prst="rect">
+            <a:avLst/>
+          </a:prstGeom>
+        </p:spPr>
+      </p:pic>
+      <p:sp>
+        <p:nvSpPr>
+          <p:cNvPr id="9" name="Rectangle 8"/>
+          <p:cNvSpPr/>
+          <p:nvPr/>
+        </p:nvSpPr>
+        <p:spPr>
+          <a:xfrm>
+            <a:off x="274320" y="6583680"/>
+            <a:ext cx="11704320" cy="228600"/>
+          </a:xfrm>
+          <a:prstGeom prst="rect">
+            <a:avLst/>
+          </a:prstGeom>
+          <a:solidFill>
+            <a:srgbClr val="1F497D"/>
+          </a:solidFill>
+          <a:ln>
+            <a:noFill/>
+          </a:ln>
+        </p:spPr>
+        <p:style>
+          <a:lnRef idx="1">
+            <a:schemeClr val="accent1"/>
+          </a:lnRef>
+          <a:fillRef idx="3">
+            <a:schemeClr val="accent1"/>
+          </a:fillRef>
+          <a:effectRef idx="2">
+            <a:schemeClr val="accent1"/>
+          </a:effectRef>
+          <a:fontRef idx="minor">
+            <a:schemeClr val="lt1"/>
+          </a:fontRef>
+        </p:style>
+        <p:txBody>
+          <a:bodyPr rtlCol="0" anchor="ctr" wrap="square"/>
+          <a:lstStyle/>
+          <a:p>
+            <a:pPr algn="ctr"/>
+            <a:r>
+              <a:rPr sz="1100" b="0">
                 <a:solidFill>
                   <a:srgbClr val="FFFFFF"/>
                 </a:solidFill>
               </a:rPr>
-              <a:t>Key insight: even with only 50-150 tokens per step, unreliable reasoning leaves a spectral fingerprint. Phi_min = the weakest step drives the final score (a chain is only as strong as its weakest link).</a:t>
+              <a:t>Phi_min = min(score_step1, score_step2, score_step3) -- weakest link.  Phi_avg = mean across steps.  Phi_last = final Thought only.
+Phi_min outperforms: a reasoning chain is only as reliable as its most uncertain step.</a:t>
             </a:r>
           </a:p>
         </p:txBody>
@@ -5788,9 +5963,62 @@
           </a:p>
         </p:txBody>
       </p:sp>
+      <p:sp>
+        <p:nvSpPr>
+          <p:cNvPr id="5" name="Rectangle 4"/>
+          <p:cNvSpPr/>
+          <p:nvPr/>
+        </p:nvSpPr>
+        <p:spPr>
+          <a:xfrm>
+            <a:off x="274320" y="1143000"/>
+            <a:ext cx="5577840" cy="914400"/>
+          </a:xfrm>
+          <a:prstGeom prst="rect">
+            <a:avLst/>
+          </a:prstGeom>
+          <a:solidFill>
+            <a:srgbClr val="E8F0FE"/>
+          </a:solidFill>
+          <a:ln>
+            <a:noFill/>
+          </a:ln>
+        </p:spPr>
+        <p:style>
+          <a:lnRef idx="1">
+            <a:schemeClr val="accent1"/>
+          </a:lnRef>
+          <a:fillRef idx="3">
+            <a:schemeClr val="accent1"/>
+          </a:fillRef>
+          <a:effectRef idx="2">
+            <a:schemeClr val="accent1"/>
+          </a:effectRef>
+          <a:fontRef idx="minor">
+            <a:schemeClr val="lt1"/>
+          </a:fontRef>
+        </p:style>
+        <p:txBody>
+          <a:bodyPr rtlCol="0" anchor="ctr" wrap="square"/>
+          <a:lstStyle/>
+          <a:p>
+            <a:pPr algn="ctr"/>
+            <a:r>
+              <a:rPr sz="1100" b="0">
+                <a:solidFill>
+                  <a:srgbClr val="323232"/>
+                </a:solidFill>
+              </a:rPr>
+              <a:t>Phi_min = min(score_step1, …, score_stepK)   [weakest link]
+Phi_avg = mean(score_step1, …, score_stepK)   [average reliability]
+Phi_last = score_stepK only   [final Thought quality]</a:t>
+            </a:r>
+          </a:p>
+        </p:txBody>
+      </p:sp>
       <p:pic>
         <p:nvPicPr>
-          <p:cNvPr id="5" name="Picture 4" descr="agentic_bar.png"/>
+          <p:cNvPr id="6" name="Picture 5" descr="agentic_bar.png"/>
           <p:cNvPicPr>
             <a:picLocks noChangeAspect="1"/>
           </p:cNvPicPr>
@@ -5804,8 +6032,8 @@
         </p:blipFill>
         <p:spPr>
           <a:xfrm>
-            <a:off x="274320" y="1188720"/>
-            <a:ext cx="5486400" cy="4206240"/>
+            <a:off x="274320" y="2148840"/>
+            <a:ext cx="5303520" cy="4572000"/>
           </a:xfrm>
           <a:prstGeom prst="rect">
             <a:avLst/>
@@ -5814,7 +6042,7 @@
       </p:pic>
       <p:sp>
         <p:nvSpPr>
-          <p:cNvPr id="6" name="TextBox 5"/>
+          <p:cNvPr id="7" name="TextBox 6"/>
           <p:cNvSpPr txBox="1"/>
           <p:nvPr/>
         </p:nvSpPr>
@@ -5848,7 +6076,7 @@
       </p:sp>
       <p:graphicFrame>
         <p:nvGraphicFramePr>
-          <p:cNvPr id="7" name="Table 6"/>
+          <p:cNvPr id="8" name="Table 7"/>
           <p:cNvGraphicFramePr>
             <a:graphicFrameLocks noGrp="1"/>
           </p:cNvGraphicFramePr>
@@ -6282,7 +6510,7 @@
       </p:graphicFrame>
       <p:sp>
         <p:nvSpPr>
-          <p:cNvPr id="8" name="TextBox 7"/>
+          <p:cNvPr id="9" name="TextBox 8"/>
           <p:cNvSpPr txBox="1"/>
           <p:nvPr/>
         </p:nvSpPr>
@@ -6328,7 +6556,7 @@
                   <a:srgbClr val="323232"/>
                 </a:solidFill>
               </a:rPr>
-              <a:t>-&gt;  Datasets: HotpotQA + 2WikiMultiHopQA (200 each)</a:t>
+              <a:t>-&gt;  Datasets: HotpotQA + 2WikiMultiHopQA (N=200 each)</a:t>
             </a:r>
           </a:p>
           <a:p>
@@ -6340,10 +6568,10 @@
             <a:r>
               <a:rPr sz="1100">
                 <a:solidFill>
-                  <a:srgbClr val="323232"/>
-                </a:solidFill>
-              </a:rPr>
-              <a:t>-&gt;  Aggregations: Phi_min / Phi_avg / Phi_last</a:t>
+                  <a:srgbClr val="FF6600"/>
+                </a:solidFill>
+              </a:rPr>
+              <a:t>-&gt;  AUQ = asks model 'how confident are you?' in natural language</a:t>
             </a:r>
           </a:p>
           <a:p>
@@ -6355,10 +6583,10 @@
             <a:r>
               <a:rPr sz="1100">
                 <a:solidFill>
-                  <a:srgbClr val="009640"/>
-                </a:solidFill>
-              </a:rPr>
-              <a:t>-&gt;  Key advantage over AUQ: gray-box (no verbalization needed), single pass per step</a:t>
+                  <a:srgbClr val="FF6600"/>
+                </a:solidFill>
+              </a:rPr>
+              <a:t>-&gt;  RLHF-aligned models often claim high confidence even when wrong</a:t>
             </a:r>
           </a:p>
           <a:p>
@@ -6370,17 +6598,17 @@
             <a:r>
               <a:rPr sz="1100">
                 <a:solidFill>
-                  <a:srgbClr val="FF6600"/>
-                </a:solidFill>
-              </a:rPr>
-              <a:t>-&gt;  AUQ requires asking model its confidence in text -- RLHF-aligned models often lie</a:t>
-            </a:r>
-          </a:p>
-        </p:txBody>
-      </p:sp>
-      <p:sp>
-        <p:nvSpPr>
-          <p:cNvPr id="9" name="Rectangle 8"/>
+                  <a:srgbClr val="009640"/>
+                </a:solidFill>
+              </a:rPr>
+              <a:t>-&gt;  Our method: no verbalization; reads spectral shape only =&gt; gray-box</a:t>
+            </a:r>
+          </a:p>
+        </p:txBody>
+      </p:sp>
+      <p:sp>
+        <p:nvSpPr>
+          <p:cNvPr id="10" name="Rectangle 9"/>
           <p:cNvSpPr/>
           <p:nvPr/>
         </p:nvSpPr>
@@ -7625,7 +7853,7 @@
                   <a:srgbClr val="CCD8F0"/>
                 </a:solidFill>
               </a:rPr>
-              <a:t>Token-level entropy H(n) = -sum_v p_v log p_v  |  single forward pass  |  no labels at test time</a:t>
+              <a:t>MATH-500 / Qwen-7B T=1.0  |  3 correct (blue) vs 3 hallucinated (orange)  |  EPR = DC (mean) only -- discards all shape</a:t>
             </a:r>
           </a:p>
         </p:txBody>
@@ -7700,7 +7928,7 @@
                   <a:srgbClr val="FFFFFF"/>
                 </a:solidFill>
               </a:rPr>
-              <a:t>We analyze the model's INTERNAL uncertainty signal -- not the text output. Gray-box: we need token probabilities from a single forward pass only.</a:t>
+              <a:t>Incorrect answers show HIGHER, MORE VARIABLE entropy throughout the reasoning trace. Gray-box method: only token log-probabilities from one forward pass -- no attention maps, no extra sampling.</a:t>
             </a:r>
           </a:p>
         </p:txBody>
@@ -7829,14 +8057,14 @@
                   <a:srgbClr val="CCD8F0"/>
                 </a:solidFill>
               </a:rPr>
-              <a:t>Average Power Spectral Density (DC removed)  |  MATH-500 / Qwen-7B T=1.0</a:t>
+              <a:t>Average PSD (DC/EPR removed)  |  4 panels: MATH-500 (1.5B, 7B) and GPQA (Mistral-7B, Qwen-7B)  |  T=1.0 solid, T=1.5 dashed</a:t>
             </a:r>
           </a:p>
         </p:txBody>
       </p:sp>
       <p:pic>
         <p:nvPicPr>
-          <p:cNvPr id="5" name="Picture 4" descr="fig2_avg_psd.png"/>
+          <p:cNvPr id="5" name="Picture 4" descr="psd_comparison.png"/>
           <p:cNvPicPr>
             <a:picLocks noChangeAspect="1"/>
           </p:cNvPicPr>
@@ -7850,8 +8078,8 @@
         </p:blipFill>
         <p:spPr>
           <a:xfrm>
-            <a:off x="1371600" y="1188720"/>
-            <a:ext cx="9418320" cy="4389120"/>
+            <a:off x="274320" y="1097280"/>
+            <a:ext cx="11612880" cy="4937760"/>
           </a:xfrm>
           <a:prstGeom prst="rect">
             <a:avLst/>
@@ -7866,8 +8094,8 @@
         </p:nvSpPr>
         <p:spPr>
           <a:xfrm>
-            <a:off x="365760" y="5760720"/>
-            <a:ext cx="11430000" cy="1005840"/>
+            <a:off x="274320" y="6126480"/>
+            <a:ext cx="8686800" cy="713232"/>
           </a:xfrm>
           <a:prstGeom prst="rect">
             <a:avLst/>
@@ -7880,48 +8108,67 @@
           </a:bodyPr>
           <a:lstStyle/>
           <a:p>
-            <a:pPr>
-              <a:spcBef>
-                <a:spcPts val="400"/>
-              </a:spcBef>
-            </a:pPr>
-            <a:r>
-              <a:rPr sz="1300">
+            <a:pPr algn="l"/>
+            <a:r>
+              <a:rPr sz="1050" b="0">
                 <a:solidFill>
                   <a:srgbClr val="323232"/>
                 </a:solidFill>
               </a:rPr>
-              <a:t>-&gt;  Incorrect outputs concentrate MORE energy at high frequencies (bursts, instability)</a:t>
-            </a:r>
-          </a:p>
-          <a:p>
-            <a:pPr>
-              <a:spcBef>
-                <a:spcPts val="400"/>
-              </a:spcBef>
-            </a:pPr>
-            <a:r>
-              <a:rPr sz="1300">
-                <a:solidFill>
-                  <a:srgbClr val="323232"/>
-                </a:solidFill>
-              </a:rPr>
-              <a:t>-&gt;  Correct outputs concentrate energy at low frequencies (smooth, structured reasoning)</a:t>
-            </a:r>
-          </a:p>
-          <a:p>
-            <a:pPr>
-              <a:spcBef>
-                <a:spcPts val="400"/>
-              </a:spcBef>
-            </a:pPr>
-            <a:r>
-              <a:rPr sz="1300">
-                <a:solidFill>
-                  <a:srgbClr val="0070C0"/>
-                </a:solidFill>
-              </a:rPr>
-              <a:t>-&gt;  EPR = mean of H(n) = DC component only.  Spectral features use the FULL PSD.</a:t>
+              <a:t>x-axis: normalised frequency in cycles per token  (0 = DC removed by construction; 0.5 = alternates every 2 tokens)
+Low band (0-0.1): one full oscillation per 10+ tokens -- slow structural patterns, reasoning stages
+High band (0.4-0.5): rapid 2-3 token bursts -- local uncertainty spikes, hallucination signature</a:t>
+            </a:r>
+          </a:p>
+        </p:txBody>
+      </p:sp>
+      <p:sp>
+        <p:nvSpPr>
+          <p:cNvPr id="7" name="Rectangle 6"/>
+          <p:cNvSpPr/>
+          <p:nvPr/>
+        </p:nvSpPr>
+        <p:spPr>
+          <a:xfrm>
+            <a:off x="9052560" y="6126480"/>
+            <a:ext cx="2926080" cy="713232"/>
+          </a:xfrm>
+          <a:prstGeom prst="rect">
+            <a:avLst/>
+          </a:prstGeom>
+          <a:solidFill>
+            <a:srgbClr val="1F497D"/>
+          </a:solidFill>
+          <a:ln>
+            <a:noFill/>
+          </a:ln>
+        </p:spPr>
+        <p:style>
+          <a:lnRef idx="1">
+            <a:schemeClr val="accent1"/>
+          </a:lnRef>
+          <a:fillRef idx="3">
+            <a:schemeClr val="accent1"/>
+          </a:fillRef>
+          <a:effectRef idx="2">
+            <a:schemeClr val="accent1"/>
+          </a:effectRef>
+          <a:fontRef idx="minor">
+            <a:schemeClr val="lt1"/>
+          </a:fontRef>
+        </p:style>
+        <p:txBody>
+          <a:bodyPr rtlCol="0" anchor="ctr" wrap="square"/>
+          <a:lstStyle/>
+          <a:p>
+            <a:pPr algn="ctr"/>
+            <a:r>
+              <a:rPr sz="1100" b="1">
+                <a:solidFill>
+                  <a:srgbClr val="FFFFFF"/>
+                </a:solidFill>
+              </a:rPr>
+              <a:t>Pattern is CONSISTENT across 4 model/dataset combos: incorrect = more high-freq energy</a:t>
             </a:r>
           </a:p>
         </p:txBody>
@@ -8050,7 +8297,7 @@
                   <a:srgbClr val="CCD8F0"/>
                 </a:solidFill>
               </a:rPr>
-              <a:t>sw_var_peak and cusum_max emerge as the two most universal features across all 5 domains</a:t>
+              <a:t>Phase 5 bar shows 12 features; 4 more added in Phase 8: cusum_max, pe_mean, hurst, cusum_shift_idx  |  16 total</a:t>
             </a:r>
           </a:p>
         </p:txBody>
@@ -8072,7 +8319,7 @@
         <p:spPr>
           <a:xfrm>
             <a:off x="274320" y="1097280"/>
-            <a:ext cx="7315200" cy="5212080"/>
+            <a:ext cx="7132320" cy="5120640"/>
           </a:xfrm>
           <a:prstGeom prst="rect">
             <a:avLst/>
@@ -8087,8 +8334,8 @@
         </p:nvSpPr>
         <p:spPr>
           <a:xfrm>
-            <a:off x="7863840" y="1188720"/>
-            <a:ext cx="4114800" cy="365760"/>
+            <a:off x="7635240" y="1143000"/>
+            <a:ext cx="4434840" cy="320040"/>
           </a:xfrm>
           <a:prstGeom prst="rect">
             <a:avLst/>
@@ -8103,12 +8350,12 @@
           <a:p>
             <a:pPr algn="l"/>
             <a:r>
-              <a:rPr sz="1300" b="1">
+              <a:rPr sz="1100" b="1">
                 <a:solidFill>
                   <a:srgbClr val="1F497D"/>
                 </a:solidFill>
               </a:rPr>
-              <a:t>Feature families:</a:t>
+              <a:t>Dataset:</a:t>
             </a:r>
           </a:p>
         </p:txBody>
@@ -8121,8 +8368,8 @@
         </p:nvSpPr>
         <p:spPr>
           <a:xfrm>
-            <a:off x="7863840" y="1691640"/>
-            <a:ext cx="4114800" cy="2834640"/>
+            <a:off x="7635240" y="1463040"/>
+            <a:ext cx="4434840" cy="868680"/>
           </a:xfrm>
           <a:prstGeom prst="rect">
             <a:avLst/>
@@ -8135,66 +8382,17 @@
           </a:bodyPr>
           <a:lstStyle/>
           <a:p>
-            <a:pPr>
-              <a:spcBef>
-                <a:spcPts val="400"/>
-              </a:spcBef>
-            </a:pPr>
-            <a:r>
-              <a:rPr sz="1150">
+            <a:pPr algn="l"/>
+            <a:r>
+              <a:rPr sz="950" b="0">
                 <a:solidFill>
                   <a:srgbClr val="323232"/>
                 </a:solidFill>
               </a:rPr>
-              <a:t>o  EPR (mean entropy) -- the paper baseline</a:t>
-            </a:r>
-          </a:p>
-          <a:p>
-            <a:pPr>
-              <a:spcBef>
-                <a:spcPts val="400"/>
-              </a:spcBef>
-            </a:pPr>
-            <a:r>
-              <a:rPr sz="1150">
-                <a:solidFill>
-                  <a:srgbClr val="0070C0"/>
-                </a:solidFill>
-              </a:rPr>
-              <a:t>o  FFT: spectral_entropy, low/high_band_power,
-   dominant_freq, spectral_centroid</a:t>
-            </a:r>
-          </a:p>
-          <a:p>
-            <a:pPr>
-              <a:spcBef>
-                <a:spcPts val="400"/>
-              </a:spcBef>
-            </a:pPr>
-            <a:r>
-              <a:rPr sz="1150">
-                <a:solidFill>
-                  <a:srgbClr val="7030A0"/>
-                </a:solidFill>
-              </a:rPr>
-              <a:t>o  STFT: stft_spectral_entropy, stft_max_high_power
-   (non-stationary, short-time)</a:t>
-            </a:r>
-          </a:p>
-          <a:p>
-            <a:pPr>
-              <a:spcBef>
-                <a:spcPts val="400"/>
-              </a:spcBef>
-            </a:pPr>
-            <a:r>
-              <a:rPr sz="1150">
-                <a:solidFill>
-                  <a:srgbClr val="FF6600"/>
-                </a:solidFill>
-              </a:rPr>
-              <a:t>o  Time-domain: sw_var_peak, cusum_max, hurst,
-   trace_length, rpdi, pe_mean, hl_ratio</a:t>
+              <a:t>MATH-500 (500 problems) / Qwen2.5-Math-7B-Instruct / T=1.0
+Model accuracy 68.7%  =&gt;  ~310 correct, ~190 wrong  (balanced)
+Why 7B? 1.5B at T=1.0 had too few errors for stable detection
+(advisor feedback from previous meeting on class imbalance)</a:t>
             </a:r>
           </a:p>
         </p:txBody>
@@ -8207,8 +8405,8 @@
         </p:nvSpPr>
         <p:spPr>
           <a:xfrm>
-            <a:off x="7863840" y="4846320"/>
-            <a:ext cx="4114800" cy="1005840"/>
+            <a:off x="7635240" y="2423160"/>
+            <a:ext cx="4434840" cy="1005840"/>
           </a:xfrm>
           <a:prstGeom prst="rect">
             <a:avLst/>
@@ -8240,17 +8438,77 @@
           <a:p>
             <a:pPr algn="ctr"/>
             <a:r>
-              <a:rPr sz="1400" b="1">
+              <a:rPr sz="1100" b="0">
                 <a:solidFill>
                   <a:srgbClr val="FFFFFF"/>
                 </a:solidFill>
               </a:rPr>
-              <a:t>Best Nadler fusion: 90.0% AUROC
-(MATH-500, Qwen-7B, T=1.0)</a:t>
-            </a:r>
-          </a:p>
-        </p:txBody>
-      </p:sp>
+              <a:t>Best Nadler subset (4 of 16):
+trace_length + spectral_centroid + rpdi + sw_var_peak
+Selected by rho-filtered exhaustive search (|rho|&lt;0.75)
+=&gt; 90.0% AUROC</a:t>
+            </a:r>
+          </a:p>
+        </p:txBody>
+      </p:sp>
+      <p:sp>
+        <p:nvSpPr>
+          <p:cNvPr id="9" name="TextBox 8"/>
+          <p:cNvSpPr txBox="1"/>
+          <p:nvPr/>
+        </p:nvSpPr>
+        <p:spPr>
+          <a:xfrm>
+            <a:off x="7635240" y="3547872"/>
+            <a:ext cx="4434840" cy="320040"/>
+          </a:xfrm>
+          <a:prstGeom prst="rect">
+            <a:avLst/>
+          </a:prstGeom>
+          <a:noFill/>
+        </p:spPr>
+        <p:txBody>
+          <a:bodyPr wrap="square">
+            <a:spAutoFit/>
+          </a:bodyPr>
+          <a:lstStyle/>
+          <a:p>
+            <a:pPr algn="l"/>
+            <a:r>
+              <a:rPr sz="1100" b="1">
+                <a:solidFill>
+                  <a:srgbClr val="1F497D"/>
+                </a:solidFill>
+              </a:rPr>
+              <a:t>Key feature formulas:</a:t>
+            </a:r>
+          </a:p>
+        </p:txBody>
+      </p:sp>
+      <p:pic>
+        <p:nvPicPr>
+          <p:cNvPr id="10" name="Picture 9" descr="formula_panel.png"/>
+          <p:cNvPicPr>
+            <a:picLocks noChangeAspect="1"/>
+          </p:cNvPicPr>
+          <p:nvPr/>
+        </p:nvPicPr>
+        <p:blipFill>
+          <a:blip r:embed="rId3"/>
+          <a:stretch>
+            <a:fillRect/>
+          </a:stretch>
+        </p:blipFill>
+        <p:spPr>
+          <a:xfrm>
+            <a:off x="7635240" y="3886200"/>
+            <a:ext cx="4434840" cy="2331720"/>
+          </a:xfrm>
+          <a:prstGeom prst="rect">
+            <a:avLst/>
+          </a:prstGeom>
+        </p:spPr>
+      </p:pic>
     </p:spTree>
   </p:cSld>
   <p:clrMapOvr>
@@ -8375,7 +8633,7 @@
                   <a:srgbClr val="CCD8F0"/>
                 </a:solidFill>
               </a:rPr>
-              <a:t>Spearman correlation  |  why Nadler fusion works: sw_var_peak and cusum_max are ORTHOGONAL to EPR</a:t>
+              <a:t>All 16 features (incl. Phase 8 additions)  |  meta-analysis  |  Spearman rho  |  why Nadler works: orthogonality to EPR cluster</a:t>
             </a:r>
           </a:p>
         </p:txBody>
@@ -9598,7 +9856,8 @@
                             <a:srgbClr val="323232"/>
                           </a:solidFill>
                         </a:rPr>
-                        <a:t>Gray-box</a:t>
+                        <a:t>White-box
+(attn.maps)</a:t>
                       </a:r>
                     </a:p>
                   </a:txBody>
@@ -9644,7 +9903,7 @@
         <p:spPr>
           <a:xfrm>
             <a:off x="6583680" y="4709160"/>
-            <a:ext cx="5486400" cy="1005840"/>
+            <a:ext cx="5486400" cy="1143000"/>
           </a:xfrm>
           <a:prstGeom prst="rect">
             <a:avLst/>
@@ -9682,7 +9941,8 @@
                 </a:solidFill>
               </a:rPr>
               <a:t>+4.0 pp over closest unsupervised competitor on same task+model
-Note: T=1.5 gives 96.6% -- ceiling artifact (more mistakes =&gt; inflated AUC); honest number is T=1.0 = 90.0%</a:t>
+LapEigvals is WHITE-BOX: needs full attention maps (all layers+heads) + supervised logistic probe. Our method: token log-probs only (gray-box) -- strictly less model access.
+T=1.5 gives 96.6% -- ceiling artifact (more mistakes =&gt; easier task); honest comparison is T=1.0.</a:t>
             </a:r>
           </a:p>
         </p:txBody>
@@ -9811,14 +10071,14 @@
                   <a:srgbClr val="CCD8F0"/>
                 </a:solidFill>
               </a:rPr>
-              <a:t>198 questions, 4-option MCQ  |  detection ceiling = model's own task accuracy</a:t>
+              <a:t>198 questions, 4-option MCQ  |  traces shorter (~100-400 tokens)  |  detection ceiling = model's own task accuracy</a:t>
             </a:r>
           </a:p>
         </p:txBody>
       </p:sp>
       <p:pic>
         <p:nvPicPr>
-          <p:cNvPr id="5" name="Picture 4" descr="gpqa_bar.png"/>
+          <p:cNvPr id="5" name="Picture 4" descr="B3_gpqa_trajectories.png"/>
           <p:cNvPicPr>
             <a:picLocks noChangeAspect="1"/>
           </p:cNvPicPr>
@@ -9832,24 +10092,48 @@
         </p:blipFill>
         <p:spPr>
           <a:xfrm>
-            <a:off x="731520" y="1188720"/>
-            <a:ext cx="5029200" cy="3931920"/>
+            <a:off x="274320" y="1143000"/>
+            <a:ext cx="6858000" cy="3200400"/>
           </a:xfrm>
           <a:prstGeom prst="rect">
             <a:avLst/>
           </a:prstGeom>
         </p:spPr>
       </p:pic>
-      <p:sp>
-        <p:nvSpPr>
-          <p:cNvPr id="6" name="TextBox 5"/>
+      <p:pic>
+        <p:nvPicPr>
+          <p:cNvPr id="6" name="Picture 5" descr="gpqa_bar.png"/>
+          <p:cNvPicPr>
+            <a:picLocks noChangeAspect="1"/>
+          </p:cNvPicPr>
+          <p:nvPr/>
+        </p:nvPicPr>
+        <p:blipFill>
+          <a:blip r:embed="rId3"/>
+          <a:stretch>
+            <a:fillRect/>
+          </a:stretch>
+        </p:blipFill>
+        <p:spPr>
+          <a:xfrm>
+            <a:off x="274320" y="4389120"/>
+            <a:ext cx="4297680" cy="2331720"/>
+          </a:xfrm>
+          <a:prstGeom prst="rect">
+            <a:avLst/>
+          </a:prstGeom>
+        </p:spPr>
+      </p:pic>
+      <p:sp>
+        <p:nvSpPr>
+          <p:cNvPr id="7" name="TextBox 6"/>
           <p:cNvSpPr txBox="1"/>
           <p:nvPr/>
         </p:nvSpPr>
         <p:spPr>
           <a:xfrm>
-            <a:off x="6035040" y="1188720"/>
-            <a:ext cx="5943600" cy="365760"/>
+            <a:off x="7406640" y="1188720"/>
+            <a:ext cx="4663440" cy="365760"/>
           </a:xfrm>
           <a:prstGeom prst="rect">
             <a:avLst/>
@@ -9876,15 +10160,15 @@
       </p:sp>
       <p:graphicFrame>
         <p:nvGraphicFramePr>
-          <p:cNvPr id="7" name="Table 6"/>
+          <p:cNvPr id="8" name="Table 7"/>
           <p:cNvGraphicFramePr>
             <a:graphicFrameLocks noGrp="1"/>
           </p:cNvGraphicFramePr>
           <p:nvPr/>
         </p:nvGraphicFramePr>
         <p:xfrm>
-          <a:off x="6035040" y="1645920"/>
-          <a:ext cx="5486400" cy="2468880"/>
+          <a:off x="7406640" y="1645920"/>
+          <a:ext cx="4937760" cy="2194560"/>
         </p:xfrm>
         <a:graphic>
           <a:graphicData uri="http://schemas.openxmlformats.org/drawingml/2006/table">
@@ -9893,14 +10177,14 @@
                 <a:tableStyleId>{5C22544A-7EE6-4342-B048-85BDC9FD1C3A}</a:tableStyleId>
               </a:tblPr>
               <a:tblGrid>
-                <a:gridCol w="1920240"/>
-                <a:gridCol w="1097280"/>
-                <a:gridCol w="640080"/>
+                <a:gridCol w="1828800"/>
+                <a:gridCol w="822960"/>
                 <a:gridCol w="594360"/>
-                <a:gridCol w="640080"/>
+                <a:gridCol w="548640"/>
                 <a:gridCol w="594360"/>
+                <a:gridCol w="548640"/>
               </a:tblGrid>
-              <a:tr h="617220">
+              <a:tr h="548640">
                 <a:tc>
                   <a:txBody>
                     <a:bodyPr/>
@@ -10034,7 +10318,7 @@
                   </a:tcPr>
                 </a:tc>
               </a:tr>
-              <a:tr h="617220">
+              <a:tr h="548640">
                 <a:tc>
                   <a:txBody>
                     <a:bodyPr/>
@@ -10168,7 +10452,7 @@
                   </a:tcPr>
                 </a:tc>
               </a:tr>
-              <a:tr h="617220">
+              <a:tr h="548640">
                 <a:tc>
                   <a:txBody>
                     <a:bodyPr/>
@@ -10302,7 +10586,7 @@
                   </a:tcPr>
                 </a:tc>
               </a:tr>
-              <a:tr h="617220">
+              <a:tr h="548640">
                 <a:tc>
                   <a:txBody>
                     <a:bodyPr/>
@@ -10443,14 +10727,14 @@
       </p:graphicFrame>
       <p:sp>
         <p:nvSpPr>
-          <p:cNvPr id="8" name="TextBox 7"/>
+          <p:cNvPr id="9" name="TextBox 8"/>
           <p:cNvSpPr txBox="1"/>
           <p:nvPr/>
         </p:nvSpPr>
         <p:spPr>
           <a:xfrm>
-            <a:off x="6035040" y="4297680"/>
-            <a:ext cx="5943600" cy="1737360"/>
+            <a:off x="7406640" y="3977639"/>
+            <a:ext cx="4663440" cy="2743200"/>
           </a:xfrm>
           <a:prstGeom prst="rect">
             <a:avLst/>
@@ -10504,7 +10788,7 @@
                   <a:srgbClr val="323232"/>
                 </a:solidFill>
               </a:rPr>
-              <a:t>-&gt;  Method is bottlenecked by model performance, not our detector</a:t>
+              <a:t>-&gt;  Bottleneck: model performance, not the detector</a:t>
             </a:r>
           </a:p>
           <a:p>
@@ -10519,7 +10803,7 @@
                   <a:srgbClr val="C00000"/>
                 </a:solidFill>
               </a:rPr>
-              <a:t>-&gt;  Gate not yet passed: need &gt;=70%; direction: even stronger model</a:t>
+              <a:t>-&gt;  Gate not yet passed: need &gt;=70%; direction: even stronger model or ensembling</a:t>
             </a:r>
           </a:p>
         </p:txBody>
